--- a/판매용_템플릿/_판매팩/장비렌탈_프리미엄/06_메뉴구조.pptx
+++ b/판매용_템플릿/_판매팩/장비렌탈_프리미엄/06_메뉴구조.pptx
@@ -948,7 +948,7 @@
             </a:avLst>
           </a:prstGeom>
           <a:solidFill>
-            <a:srgbClr val="E4762C"/>
+            <a:srgbClr val="BC5918"/>
           </a:solidFill>
           <a:ln/>
         </p:spPr>
@@ -1442,7 +1442,7 @@
             </a:avLst>
           </a:prstGeom>
           <a:solidFill>
-            <a:srgbClr val="E4762C"/>
+            <a:srgbClr val="BC5918"/>
           </a:solidFill>
           <a:ln/>
         </p:spPr>
@@ -2020,7 +2020,7 @@
             </a:avLst>
           </a:prstGeom>
           <a:solidFill>
-            <a:srgbClr val="E4762C"/>
+            <a:srgbClr val="BC5918"/>
           </a:solidFill>
           <a:ln/>
         </p:spPr>
@@ -2346,7 +2346,7 @@
             </a:avLst>
           </a:prstGeom>
           <a:solidFill>
-            <a:srgbClr val="E4762C"/>
+            <a:srgbClr val="BC5918"/>
           </a:solidFill>
           <a:ln/>
         </p:spPr>
@@ -2924,7 +2924,7 @@
             </a:avLst>
           </a:prstGeom>
           <a:solidFill>
-            <a:srgbClr val="E4762C"/>
+            <a:srgbClr val="BC5918"/>
           </a:solidFill>
           <a:ln/>
         </p:spPr>
@@ -3502,7 +3502,7 @@
             </a:avLst>
           </a:prstGeom>
           <a:solidFill>
-            <a:srgbClr val="E4762C"/>
+            <a:srgbClr val="BC5918"/>
           </a:solidFill>
           <a:ln/>
         </p:spPr>
@@ -3912,7 +3912,7 @@
             </a:avLst>
           </a:prstGeom>
           <a:solidFill>
-            <a:srgbClr val="E4762C"/>
+            <a:srgbClr val="BC5918"/>
           </a:solidFill>
           <a:ln/>
         </p:spPr>
@@ -4322,7 +4322,7 @@
             </a:avLst>
           </a:prstGeom>
           <a:solidFill>
-            <a:srgbClr val="E4762C"/>
+            <a:srgbClr val="BC5918"/>
           </a:solidFill>
           <a:ln/>
         </p:spPr>
